--- a/docs/DBARS_Idea_Approval_Presentation.pptx
+++ b/docs/DBARS_Idea_Approval_Presentation.pptx
@@ -2567,28 +2567,28 @@
           <a:lstStyle/>
           <a:p>
             <a:r>
-              <a:t>OBJECTIVES (1 minute). Four objectives, each starting with an infinitive verb and each with a measurable success target so the panel can judge the project at the end.</a:t>
+              <a:t>OBJECTIVES (1 minute). Four objectives, each starting with an infinitive verb and each with a target the panel can check at the end of the project.</a:t>
             </a:r>
           </a:p>
           <a:p/>
           <a:p>
             <a:r>
-              <a:t>1) Develop: journey planner; targets are the acceptance thresholds we will enforce: best-option rate at least 0.70, within 2 stops at least 0.92, p90 latency at most 1.6 s.</a:t>
+              <a:t>1) Develop: the journey planner. We will build a test set of stop pairs and measure how often the best bus is ranked first and how fast results come back.</a:t>
             </a:r>
           </a:p>
           <a:p>
             <a:r>
-              <a:t>2) Establish: operations planner, with a hard lower bound so we can say how close to minimal the fleet is.</a:t>
+              <a:t>2) Establish: the operations planner. A lower bound lets us say how close to minimal the fleet number is.</a:t>
             </a:r>
           </a:p>
           <a:p>
             <a:r>
-              <a:t>3) Analyse: demand loop plus money handling: fare value versus fare collected for Shakti.</a:t>
+              <a:t>3) Analyse: the demand loop plus money handling, including the full fare value of free Shakti rides.</a:t>
             </a:r>
           </a:p>
           <a:p>
             <a:r>
-              <a:t>4) Publish and evaluate: GTFS export and an honest evaluation, where the headline metric can fail.</a:t>
+              <a:t>4) Publish and evaluate: open timetable data and an honest evaluation, where the headline metric is one that can fail.</a:t>
             </a:r>
           </a:p>
         </p:txBody>
@@ -2664,28 +2664,28 @@
           <a:p/>
           <a:p>
             <a:r>
-              <a:t>1) Search: for every route and every ordered pair of stops (i before j) we store the route, so a direct journey is a dictionary lookup. Transfers intersect the routes serving each end but reject any changeover more than 1.2 km apart, because Bengaluru reuses stop names. Anchored resolution keeps a map from drawing a wrong, longer path.</a:t>
+              <a:t>1) Journey search: routes are indexed in stop order, so the system can quickly tell which buses go from A to B in the right direction. Transfers are limited to short walks because Bengaluru reuses stop names in different areas.</a:t>
             </a:r>
           </a:p>
           <a:p>
             <a:r>
-              <a:t>2) Operations: greedy blocking is optimal without an idle cap; the peak-concurrency bound is the hard floor. Crew duties are cut with dynamic programming and paired greedily.</a:t>
+              <a:t>2) Operations: trips are chained into bus schedules; the number of trips running at the same moment gives a hard floor on the fleet, so we can show how close to minimal our number is. Crew duties are then cut from those schedules under legal limits.</a:t>
             </a:r>
           </a:p>
           <a:p>
             <a:r>
-              <a:t>3) Demand and money: four fraud heuristics; Shakti keeps fare value and fare collected separate; offline sync is idempotent.</a:t>
+              <a:t>3) Demand and money: votes are checked for abuse before they reach a depot manager; free Shakti rides keep their full fare value for reimbursement; offline sales sync without double-counting.</a:t>
             </a:r>
           </a:p>
           <a:p>
             <a:r>
-              <a:t>4) Open data: mark every interpolated stop time as not exact; never publish simulated positions as live.</a:t>
+              <a:t>4) Open data: GTFS is the global standard for timetables; estimated times and positions are always labelled.</a:t>
             </a:r>
           </a:p>
           <a:p/>
           <a:p>
             <a:r>
-              <a:t>Why not machine learning? The routing engine is classical information retrieval and graph search, benchmarked against baseline rankers. Say this clearly: a professor will ask 'where is the AI?'</a:t>
+              <a:t>Why not machine learning? The routing is classical search and ranking, compared against simple baselines. Say this clearly: a professor will ask 'where is the AI?'</a:t>
             </a:r>
           </a:p>
         </p:txBody>
@@ -2755,25 +2755,25 @@
           <a:lstStyle/>
           <a:p>
             <a:r>
-              <a:t>PROPOSED ARCHITECTURE (1 minute 30 seconds). Four layers with a one-way dependency rule: API (HTTP only) calls services (business rules, the only place the database is touched), which call engines (pure computation over files) and data.</a:t>
+              <a:t>PROPOSED ARCHITECTURE (1 minute 30 seconds). Four roles use one app. Requests pass through an application layer that handles logins and security, then a business-rules layer for votes, tickets, waybills and alerts. Underneath are the core engines (journey search, fleet and crew planning, open-data export, tracking) and the data.</a:t>
             </a:r>
           </a:p>
           <a:p/>
           <a:p>
             <a:r>
-              <a:t>The key design decision: engines read files, not the database. If MongoDB is down, people can still find their bus; only logins and tickets stop. This is a deliberate resilience choice for a public service.</a:t>
+              <a:t>Key design decision: the core engines work straight from the timetable data, so even if the part of the system that stores tickets and accounts is down, people can still find their bus. This is a deliberate resilience choice for a public service.</a:t>
             </a:r>
           </a:p>
           <a:p/>
           <a:p>
             <a:r>
-              <a:t>The AI layer is additive and read-only: it retrieves and cites, and it cannot change any operational data. Do not call the project LLM-powered; the routing engine is classical search.</a:t>
+              <a:t>The assistant is additive and read-only: it answers from approved sources, cites them, and cannot change operational data. Do not call the project 'AI-powered'; the routing is classical search.</a:t>
             </a:r>
           </a:p>
           <a:p/>
           <a:p>
             <a:r>
-              <a:t>Stack choices are proposals; they were chosen for fast development, strong typing, and easy deployment with Docker.</a:t>
+              <a:t>If asked about technology: we will use standard open-source web technologies and fix the exact choices after the requirements phase (weeks 1 to 3).</a:t>
             </a:r>
           </a:p>
         </p:txBody>
@@ -2849,7 +2849,7 @@
           <a:p/>
           <a:p>
             <a:r>
-              <a:t>Commuter: journey search with transfers, fares, maps and Metro links, four languages and an SMS channel for feature phones, votes for routes, QR tickets. Conductor: works offline, sync cannot double-count, cash variance is reported and never silently corrected, Shakti trips keep both the fare value and the fare collected. Depot manager and HQ: the operator-side tools consumer apps do not describe: minimum fleet, crew duties, what-if scenarios, ranked demand recommendations, reimbursement reporting, audit log. Open data and admin: GTFS and GTFS-Realtime alerts; vehicle positions only ever published if live.</a:t>
+              <a:t>Commuter: journey search with transfers, fares, maps and Metro links, four languages and SMS for feature phones, votes for routes, QR tickets. Conductor: works without signal, never counts revenue twice, shows any cash shortfall instead of hiding it, and records free Shakti trips at full fare value. Depot manager and HQ: the operator-side tools that consumer apps do not describe: minimum fleet, crew duties, what-if scenarios, ranked demand, reimbursement reports, audit log. Open data and admin: open timetable data and alerts; vehicle positions only ever called live when they are.</a:t>
             </a:r>
           </a:p>
           <a:p/>
@@ -3019,7 +3019,7 @@
           <a:p/>
           <a:p>
             <a:r>
-              <a:t>Five reasons, in order of strength. 1) The closed loop from demand to dispatch: none of the public descriptions of the existing apps mention it, and it is the reason for the project's name. 2) One dataset for both sides. 3) The money path: Shakti reimbursement needs the full fare value of free rides; offline conductor sales need idempotent sync; cash variance must be visible, not hidden. 4) Honest labels: we never present simulated positions as live. 5) Open and inclusive.</a:t>
+              <a:t>Five reasons, in order of strength. 1) The closed loop from demand to dispatch: none of the public descriptions of the existing apps mention it, and it is the reason for the project's name. 2) One dataset for both sides. 3) The money path: Shakti reimbursement needs the full fare value of free rides; offline conductor sales must never be counted twice; cash variance must be visible, not hidden. 4) Honest labels: we never present simulated positions as live. 5) Open and inclusive.</a:t>
             </a:r>
           </a:p>
           <a:p/>
@@ -3177,13 +3177,13 @@
           <a:p/>
           <a:p>
             <a:r>
-              <a:t>The performance targets are acceptance thresholds we will enforce in an automated accuracy check; the check fails the build if the headline metric slips. Explain the metrics: 'best-option rate' is how often the best valid bus is ranked first; 'within 2 stops' is how often the top result is within two stops of the best; 'mean percentile rank' is the average position of the best option (lower is better); 'coverage' is how often any valid bus is returned. We deliberately do NOT headline coverage, because it is easy to satisfy.</a:t>
+              <a:t>Performance targets: we will define a test set of origin-destination pairs and check how often the best valid bus is ranked first, how quickly results come back, and how often the system returns at least one valid route. We will not headline the 'always returns something' number, because it is easy to satisfy; the ranking target is the one that can genuinely fail.</a:t>
             </a:r>
           </a:p>
           <a:p/>
           <a:p>
             <a:r>
-              <a:t>The 2.0 to 2.5 crew-to-bus range for real transport undertakings is a rule-of-thumb figure we will use as a sanity check on the crew plan.</a:t>
+              <a:t>The crew-to-bus ratio will be compared with typical figures for real bus operators as a sanity check on the crew plan.</a:t>
             </a:r>
           </a:p>
         </p:txBody>
@@ -3341,13 +3341,13 @@
           <a:lstStyle/>
           <a:p>
             <a:r>
-              <a:t>GANTT CHART (30 seconds). The 16-week plan groups the work into six phases: data and survey; journey engine; operations engines (vehicle blocking, crew duties); platform services (auth, votes, tickets, waybills); open data and interface (GTFS, tracking, React); evaluation, assistant and release (tests, CI, deployment).</a:t>
+              <a:t>GANTT CHART (30 seconds). Sixteen weeks in six phases: data and survey; journey planner; operations planner (fleet and crew); platform services (logins, votes, tickets, waybills); open data and interface; evaluation, assistant and release.</a:t>
             </a:r>
           </a:p>
           <a:p/>
           <a:p>
             <a:r>
-              <a:t>Review points are suggested for weeks 4, 8, 12 and 16 so the guide and panel can check progress. The plan is ordered so the core (journey search and fleet planning) is delivered first and the extras (assistant, extra languages) last; if time runs short, the extras slip and the core does not.</a:t>
+              <a:t>Review points at weeks 4, 8, 12 and 16 let the guide and panel check progress. The order puts the core (journey search and fleet planning) first and the extras (assistant, extra languages) last; if time runs short, the extras slip and the core does not.</a:t>
             </a:r>
           </a:p>
         </p:txBody>
@@ -3423,7 +3423,7 @@
           <a:p/>
           <a:p>
             <a:r>
-              <a:t>Biggest risk: no live vehicle feed. We do not depend on it: the adapter interface lets BMTC's feed plug in later, and until then positions are labelled as estimates. Second: fleet and crew numbers are modelled under stated assumptions, so the pilot step compares them with real rosters. Others are engineering risks with concrete mitigations. The scope risk is handled by the phased plan: core first, extras last.</a:t>
+              <a:t>Biggest risk: no live vehicle feed. The project does not depend on one: the design lets BMTC's feed plug in later, and until then positions are labelled as estimates. Second: fleet and crew numbers are modelled under stated assumptions, so the pilot compares them with real rosters. The rest are engineering risks with concrete mitigations. The scope risk is handled by the phased plan: core first, extras last.</a:t>
             </a:r>
           </a:p>
         </p:txBody>
@@ -3493,7 +3493,7 @@
           <a:lstStyle/>
           <a:p>
             <a:r>
-              <a:t>CONCLUSION (45 seconds). Answer the template's four questions: what problem, why relevant, what outcome, why feasible. Feasibility rests on four things: the data inputs are available, the methods are established in the literature, the technology is standard, and the plan is phased with the core first.</a:t>
+              <a:t>CONCLUSION (45 seconds). Answer the template's four questions: what problem, why relevant, what outcome, why feasible. Feasibility rests on four things: the data inputs are available, the methods are established in the literature, the technology choices are standard, and the plan is phased with the core first.</a:t>
             </a:r>
           </a:p>
           <a:p/>
@@ -3575,7 +3575,7 @@
           <a:p/>
           <a:p>
             <a:r>
-              <a:t>The project data itself (BMTC published timetable, stop coordinates, fare table, Namma Metro network) is in the dataset folder of the repository and is not a literature reference.</a:t>
+              <a:t>The project data itself (BMTC published timetable, stop coordinates, fare table, Namma Metro network) is the project's input data and is not a literature reference.</a:t>
             </a:r>
           </a:p>
         </p:txBody>
@@ -29727,7 +29727,7 @@
                 </a:solidFill>
                 <a:latin typeface="Arial"/>
               </a:rPr>
-              <a:t>a journey planner for direct, one-change and two-change bus journeys between any two of 4,883 stops.</a:t>
+              <a:t>a journey planner for direct, one-change and two-change bus journeys between any two of the 4,883 stops.</a:t>
             </a:r>
             <a:endParaRPr sz="1400"/>
           </a:p>
@@ -29761,7 +29761,7 @@
                 </a:solidFill>
                 <a:latin typeface="Arial"/>
               </a:rPr>
-              <a:t>Success target: best option ranked first in at least 70% of test pairs; within 2 stops of the best in at least 92%; search under 1.6 s (p90).</a:t>
+              <a:t>Target: the correct bus comes up as the top suggestion in the large majority of cases, and results return quickly enough to feel instant.</a:t>
             </a:r>
             <a:endParaRPr sz="1150"/>
           </a:p>
@@ -29876,7 +29876,7 @@
                 </a:solidFill>
                 <a:latin typeface="Arial"/>
               </a:rPr>
-              <a:t>an operations planner that computes the minimum fleet, dead kilometres and crew duties a timetable needs.</a:t>
+              <a:t>an operations planner that works out the minimum fleet, dead kilometres and crew duties a timetable needs.</a:t>
             </a:r>
             <a:endParaRPr sz="1400"/>
           </a:p>
@@ -29910,7 +29910,7 @@
                 </a:solidFill>
                 <a:latin typeface="Arial"/>
               </a:rPr>
-              <a:t>Success target: fleet size reported with a provable lower bound; crew duties cut under legal limits; assumptions shown with every result.</a:t>
+              <a:t>Target: every fleet number comes with a mathematically justified lower bound, and every result shows the assumptions behind it.</a:t>
             </a:r>
             <a:endParaRPr sz="1150"/>
           </a:p>
@@ -30025,7 +30025,7 @@
                 </a:solidFill>
                 <a:latin typeface="Arial"/>
               </a:rPr>
-              <a:t>commuter demand and turn it into action: fraud-checked votes become ranked depot dispatch recommendations, with e-tickets, Shakti and cash tracked correctly.</a:t>
+              <a:t>commuter demand and turn it into action: votes for under-served routes, checked for abuse, become ranked recommendations for depot managers.</a:t>
             </a:r>
             <a:endParaRPr sz="1400"/>
           </a:p>
@@ -30059,7 +30059,7 @@
                 </a:solidFill>
                 <a:latin typeface="Arial"/>
               </a:rPr>
-              <a:t>Success target: every voted pair resolves to a real bus; free rides keep their fare value; offline sales never double-count.</a:t>
+              <a:t>Target: e-tickets, free Shakti travel and conductor cash are all tracked correctly, with no revenue counted twice.</a:t>
             </a:r>
             <a:endParaRPr sz="1150"/>
           </a:p>
@@ -30174,7 +30174,7 @@
                 </a:solidFill>
                 <a:latin typeface="Arial"/>
               </a:rPr>
-              <a:t>the network as open GTFS data and evaluate the whole system with honest, reproducible metrics.</a:t>
+              <a:t>the network as open data and evaluate the whole system against clear, honest benchmarks.</a:t>
             </a:r>
             <a:endParaRPr sz="1400"/>
           </a:p>
@@ -30208,7 +30208,7 @@
                 </a:solidFill>
                 <a:latin typeface="Arial"/>
               </a:rPr>
-              <a:t>Success target: valid GTFS export with estimated times flagged; automated tests and an accuracy gate that can fail, run in CI.</a:t>
+              <a:t>Target: an open-format timetable any app can reuse, with estimates flagged, and accuracy judged by a metric that can genuinely fail.</a:t>
             </a:r>
             <a:endParaRPr sz="1150"/>
           </a:p>
@@ -30484,7 +30484,7 @@
                           </a:solidFill>
                           <a:latin typeface="Arial"/>
                         </a:rPr>
-                        <a:t>Clean and alias stop names (Majestic = Kempegowda Bus Station), then fuzzy-match</a:t>
+                        <a:t>Index bus routes by stop sequence so direct and connecting journeys are found quickly</a:t>
                       </a:r>
                       <a:endParaRPr sz="1100"/>
                     </a:p>
@@ -30503,7 +30503,7 @@
                           </a:solidFill>
                           <a:latin typeface="Arial"/>
                         </a:rPr>
-                        <a:t>Ordered stop-pair index: for every route, every pair of stops (i before j)</a:t>
+                        <a:t>Clean and match stop names, including local names (Majestic = Kempegowda Bus Station)</a:t>
                       </a:r>
                       <a:endParaRPr sz="1100"/>
                     </a:p>
@@ -30522,7 +30522,7 @@
                           </a:solidFill>
                           <a:latin typeface="Arial"/>
                         </a:rPr>
-                        <a:t>Transfers via shared stops; reject changes over 1.2 km apart; anchored stop resolution</a:t>
+                        <a:t>Suggest a transfer only where the walk between stops is short and realistic</a:t>
                       </a:r>
                       <a:endParaRPr sz="1100"/>
                     </a:p>
@@ -30541,7 +30541,7 @@
                           </a:solidFill>
                           <a:latin typeface="Arial"/>
                         </a:rPr>
-                        <a:t>Rank by stop span, trip frequency and a span penalty</a:t>
+                        <a:t>Rank results by how direct and how frequent each option is</a:t>
                       </a:r>
                       <a:endParaRPr sz="1100"/>
                     </a:p>
@@ -30583,7 +30583,7 @@
                           </a:solidFill>
                           <a:latin typeface="Arial"/>
                         </a:rPr>
-                        <a:t>Direction matters, so a direct trip becomes one dictionary lookup. The dataset is a route catalogue with no labels, so a search index beats a classifier.</a:t>
+                        <a:t>Direction matters, so routes are indexed in stop order. The data is a route catalogue with no labels, so a search index suits it better than a trained classifier.</a:t>
                       </a:r>
                       <a:endParaRPr sz="1100"/>
                     </a:p>
@@ -30677,7 +30677,7 @@
                           </a:solidFill>
                           <a:latin typeface="Arial"/>
                         </a:rPr>
-                        <a:t>Vehicle blocking: greedy chaining plus a peak-concurrency lower bound</a:t>
+                        <a:t>Chain trips efficiently to find the minimum number of buses a timetable needs</a:t>
                       </a:r>
                       <a:endParaRPr sz="1100"/>
                     </a:p>
@@ -30696,7 +30696,7 @@
                           </a:solidFill>
                           <a:latin typeface="Arial"/>
                         </a:rPr>
-                        <a:t>Crew: dynamic programme cuts legal pieces; bounded greedy pairing</a:t>
+                        <a:t>Compare against a lower bound: the most trips running at the same moment</a:t>
                       </a:r>
                       <a:endParaRPr sz="1100"/>
                     </a:p>
@@ -30715,7 +30715,7 @@
                           </a:solidFill>
                           <a:latin typeface="Arial"/>
                         </a:rPr>
-                        <a:t>Assumptions kept in parameter objects and echoed in every response</a:t>
+                        <a:t>Derive legal crew duties from those bus schedules; state all assumptions</a:t>
                       </a:r>
                       <a:endParaRPr sz="1100"/>
                     </a:p>
@@ -30759,7 +30759,7 @@
                           </a:solidFill>
                           <a:latin typeface="Arial"/>
                         </a:rPr>
-                        <a:t>A hard lower bound shows whether the fleet number is provably minimal. Blocks alone are not enough: a plan is only real if crews can staff it.</a:t>
+                        <a:t>A lower bound shows whether the fleet number is truly minimal. A plan only counts if crews can staff it.</a:t>
                       </a:r>
                       <a:endParaRPr sz="1100"/>
                     </a:p>
@@ -30853,7 +30853,7 @@
                           </a:solidFill>
                           <a:latin typeface="Arial"/>
                         </a:rPr>
-                        <a:t>Votes will pass 4 fraud checks, be grouped by origin-destination, resolved to real buses and ranked HIGH/MEDIUM/LOW</a:t>
+                        <a:t>Check votes for suspicious patterns, group them by origin and destination, rank for depots</a:t>
                       </a:r>
                       <a:endParaRPr sz="1100"/>
                     </a:p>
@@ -30872,7 +30872,7 @@
                           </a:solidFill>
                           <a:latin typeface="Arial"/>
                         </a:rPr>
-                        <a:t>Server-side fares from the stage table; signed QR tickets; Shakti will store value and collected fare</a:t>
+                        <a:t>Calculate fares centrally; issue QR tickets; record the full fare value of free Shakti rides</a:t>
                       </a:r>
                       <a:endParaRPr sz="1100"/>
                     </a:p>
@@ -30891,7 +30891,7 @@
                           </a:solidFill>
                           <a:latin typeface="Arial"/>
                         </a:rPr>
-                        <a:t>Offline sales: client UUID plus unique index gives idempotent sync</a:t>
+                        <a:t>Let conductors sell offline and sync safely, with no duplicate charges</a:t>
                       </a:r>
                       <a:endParaRPr sz="1100"/>
                     </a:p>
@@ -30933,7 +30933,7 @@
                           </a:solidFill>
                           <a:latin typeface="Arial"/>
                         </a:rPr>
-                        <a:t>Closes the loop from passengers to depots. Buses lose signal, so offline must be the default path and replays must never double-count revenue.</a:t>
+                        <a:t>Closes the loop from passengers to depots. Buses lose signal, so offline must be the default, and syncing must never count revenue twice.</a:t>
                       </a:r>
                       <a:endParaRPr sz="1100"/>
                     </a:p>
@@ -31027,7 +31027,7 @@
                           </a:solidFill>
                           <a:latin typeface="Arial"/>
                         </a:rPr>
-                        <a:t>Stream stop_times into a GTFS zip; flag interpolated times; GTFS-Realtime alerts</a:t>
+                        <a:t>Publish the network in the open GTFS format, flagging estimated timings</a:t>
                       </a:r>
                       <a:endParaRPr sz="1100"/>
                     </a:p>
@@ -31046,7 +31046,7 @@
                           </a:solidFill>
                           <a:latin typeface="Arial"/>
                         </a:rPr>
-                        <a:t>Simulated positions will carry is_live=False; the live endpoint will refuse to publish them</a:t>
+                        <a:t>Label vehicle positions as live only when they truly are</a:t>
                       </a:r>
                       <a:endParaRPr sz="1100"/>
                     </a:p>
@@ -31065,7 +31065,7 @@
                           </a:solidFill>
                           <a:latin typeface="Arial"/>
                         </a:rPr>
-                        <a:t>Benchmark 4 rankers; headline metric is rank quality, not coverage</a:t>
+                        <a:t>Judge accuracy with a benchmark that can fail, compared against simple baselines</a:t>
                       </a:r>
                       <a:endParaRPr sz="1100"/>
                     </a:p>
@@ -31109,7 +31109,7 @@
                           </a:solidFill>
                           <a:latin typeface="Arial"/>
                         </a:rPr>
-                        <a:t>Standard formats let any app reuse the timetable. Honest labelling and a metric that can fail keep results defensible.</a:t>
+                        <a:t>Open formats let any app reuse the timetable. Honest labels and a metric that can fail keep results defensible.</a:t>
                       </a:r>
                       <a:endParaRPr sz="1100"/>
                     </a:p>
@@ -31454,7 +31454,7 @@
                 </a:solidFill>
                 <a:latin typeface="Arial"/>
               </a:rPr>
-              <a:t>Frontend: React + TypeScript web app</a:t>
+              <a:t>User layer: web and mobile app</a:t>
             </a:r>
             <a:endParaRPr sz="1200"/>
           </a:p>
@@ -31488,7 +31488,7 @@
                 </a:solidFill>
                 <a:latin typeface="Arial"/>
               </a:rPr>
-              <a:t>Maps, charts, English / Kannada / Hindi / Telugu; installable as an Android app</a:t>
+              <a:t>Maps, charts, English / Kannada / Hindi / Telugu; installable on Android phones; SMS for feature phones</a:t>
             </a:r>
             <a:endParaRPr sz="1100"/>
           </a:p>
@@ -31584,7 +31584,7 @@
                 </a:solidFill>
                 <a:latin typeface="Arial"/>
               </a:rPr>
-              <a:t>API layer: FastAPI (REST)</a:t>
+              <a:t>Application layer: requests and security</a:t>
             </a:r>
             <a:endParaRPr sz="1200"/>
           </a:p>
@@ -31618,7 +31618,7 @@
                 </a:solidFill>
                 <a:latin typeface="Arial"/>
               </a:rPr>
-              <a:t>HTTP only: signed tokens, role-based access, input validation, rate limiting</a:t>
+              <a:t>Logins, role-based access, input checks and protection against misuse</a:t>
             </a:r>
             <a:endParaRPr sz="1100"/>
           </a:p>
@@ -31714,7 +31714,7 @@
                 </a:solidFill>
                 <a:latin typeface="Arial"/>
               </a:rPr>
-              <a:t>Service layer: business rules</a:t>
+              <a:t>Business-rules layer</a:t>
             </a:r>
             <a:endParaRPr sz="1200"/>
           </a:p>
@@ -31748,7 +31748,7 @@
                 </a:solidFill>
                 <a:latin typeface="Arial"/>
               </a:rPr>
-              <a:t>The only layer that touches the database: votes, tickets, waybills, passes, alerts, audit log</a:t>
+              <a:t>Votes, tickets, waybills, passes, alerts and the audit log</a:t>
             </a:r>
             <a:endParaRPr sz="1100"/>
           </a:p>
@@ -31874,7 +31874,7 @@
                 </a:solidFill>
                 <a:latin typeface="Arial"/>
               </a:rPr>
-              <a:t>Engine layer (files, no DB)</a:t>
+              <a:t>Core engines</a:t>
             </a:r>
             <a:endParaRPr sz="1200"/>
           </a:p>
@@ -31908,7 +31908,7 @@
                 </a:solidFill>
                 <a:latin typeface="Arial"/>
               </a:rPr>
-              <a:t>Journey search, vehicle blocking, crew duties, GTFS builder, vehicle tracking</a:t>
+              <a:t>Journey search, fleet planning, crew duties, open-data export, vehicle tracking</a:t>
             </a:r>
             <a:endParaRPr sz="1100"/>
           </a:p>
@@ -32008,7 +32008,7 @@
                 </a:solidFill>
                 <a:latin typeface="Arial"/>
               </a:rPr>
-              <a:t>MongoDB (optional). CSV files: BMTC route-directions, stop coordinates, fares, Metro network</a:t>
+              <a:t>BMTC timetable, stop coordinates, fares and Metro network; storage for tickets, accounts and logs</a:t>
             </a:r>
             <a:endParaRPr sz="1100"/>
           </a:p>
@@ -32074,7 +32074,7 @@
                 </a:solidFill>
                 <a:latin typeface="Arial"/>
               </a:rPr>
-              <a:t>AI Intelligence Layer</a:t>
+              <a:t>Assistant layer</a:t>
             </a:r>
             <a:endParaRPr sz="1200"/>
           </a:p>
@@ -32130,7 +32130,7 @@
                 </a:solidFill>
                 <a:latin typeface="Arial"/>
               </a:rPr>
-              <a:t>Retrieval over project documentation and code</a:t>
+              <a:t>Answers questions from approved documents and data</a:t>
             </a:r>
             <a:endParaRPr sz="1150"/>
           </a:p>
@@ -32152,7 +32152,7 @@
                 </a:solidFill>
                 <a:latin typeface="Arial"/>
               </a:rPr>
-              <a:t>Read-only tools, role-gated at a single chokepoint</a:t>
+              <a:t>Cannot change any operational data</a:t>
             </a:r>
             <a:endParaRPr sz="1150"/>
           </a:p>
@@ -32174,7 +32174,7 @@
                 </a:solidFill>
                 <a:latin typeface="Arial"/>
               </a:rPr>
-              <a:t>Agents for operations and travel questions</a:t>
+              <a:t>Access follows the user's role</a:t>
             </a:r>
             <a:endParaRPr sz="1150"/>
           </a:p>
@@ -32252,7 +32252,7 @@
                 </a:solidFill>
                 <a:latin typeface="Arial"/>
               </a:rPr>
-              <a:t>Engines read files, not the database, so route search, fleet, crew and GTFS survive a DB outage.</a:t>
+              <a:t>Core engines work straight from the timetable data, so journey search and planning keep running even if other parts fail.</a:t>
             </a:r>
             <a:endParaRPr sz="1100"/>
           </a:p>
@@ -32290,24 +32290,24 @@
           <a:p>
             <a:pPr algn="l"/>
             <a:r>
-              <a:rPr sz="1050" b="1" i="0">
+              <a:rPr sz="1100" b="1" i="0">
                 <a:solidFill>
                   <a:srgbClr val="C00000"/>
                 </a:solidFill>
                 <a:latin typeface="Arial"/>
               </a:rPr>
-              <a:t>Planned stack: </a:t>
+              <a:t>Technology: </a:t>
             </a:r>
             <a:r>
-              <a:rPr sz="1050" b="0" i="0">
+              <a:rPr sz="1100" b="0" i="0">
                 <a:solidFill>
                   <a:srgbClr val="1F2937"/>
                 </a:solidFill>
                 <a:latin typeface="Arial"/>
               </a:rPr>
-              <a:t>Python 3.12, FastAPI, Pydantic 2, MongoDB (Motor) | React, TypeScript, Vite, Tailwind, Leaflet | Docker Compose, Nginx, GitHub Actions CI</a:t>
+              <a:t>planned with standard, widely used open-source web technologies, finalised after the requirements phase.</a:t>
             </a:r>
-            <a:endParaRPr sz="1050"/>
+            <a:endParaRPr sz="1100"/>
           </a:p>
         </p:txBody>
       </p:sp>
@@ -32495,7 +32495,7 @@
                 </a:solidFill>
                 <a:latin typeface="Arial"/>
               </a:rPr>
-              <a:t>Fuzzy stop names and aliases (Majestic = Kempegowda Bus Station)</a:t>
+              <a:t>Stop names found even with local names or typos</a:t>
             </a:r>
             <a:endParaRPr sz="1200"/>
           </a:p>
@@ -32678,7 +32678,7 @@
                 </a:solidFill>
                 <a:latin typeface="Arial"/>
               </a:rPr>
-              <a:t>Offline-first digital waybill that works with no signal</a:t>
+              <a:t>Digital waybill that works with no signal</a:t>
             </a:r>
             <a:endParaRPr sz="1200"/>
           </a:p>
@@ -32700,7 +32700,7 @@
                 </a:solidFill>
                 <a:latin typeface="Arial"/>
               </a:rPr>
-              <a:t>Idempotent sync: a replay never double-counts revenue</a:t>
+              <a:t>Safe syncing that never counts revenue twice</a:t>
             </a:r>
             <a:endParaRPr sz="1200"/>
           </a:p>
@@ -32722,7 +32722,7 @@
                 </a:solidFill>
                 <a:latin typeface="Arial"/>
               </a:rPr>
-              <a:t>Server-side stage fares; signed QR tickets to validate</a:t>
+              <a:t>Centrally calculated fares; QR tickets to check</a:t>
             </a:r>
             <a:endParaRPr sz="1200"/>
           </a:p>
@@ -32744,7 +32744,7 @@
                 </a:solidFill>
                 <a:latin typeface="Arial"/>
               </a:rPr>
-              <a:t>Cash reconciliation: variance reported, never auto-corrected</a:t>
+              <a:t>Cash reconciliation: any shortfall is shown, not hidden</a:t>
             </a:r>
             <a:endParaRPr sz="1200"/>
           </a:p>
@@ -32883,7 +32883,7 @@
                 </a:solidFill>
                 <a:latin typeface="Arial"/>
               </a:rPr>
-              <a:t>Minimum fleet, dead kilometres and crew duties, with a proven lower bound</a:t>
+              <a:t>Minimum fleet, dead kilometres and crew duties, with a lower bound</a:t>
             </a:r>
             <a:endParaRPr sz="1200"/>
           </a:p>
@@ -33088,7 +33088,7 @@
                 </a:solidFill>
                 <a:latin typeface="Arial"/>
               </a:rPr>
-              <a:t>GTFS export with estimated times flagged</a:t>
+              <a:t>Open timetable export (GTFS) with estimated times flagged</a:t>
             </a:r>
             <a:endParaRPr sz="1200"/>
           </a:p>
@@ -33110,7 +33110,7 @@
                 </a:solidFill>
                 <a:latin typeface="Arial"/>
               </a:rPr>
-              <a:t>GTFS-Realtime service alerts</a:t>
+              <a:t>Live service alerts for other apps</a:t>
             </a:r>
             <a:endParaRPr sz="1200"/>
           </a:p>
@@ -33132,7 +33132,7 @@
                 </a:solidFill>
                 <a:latin typeface="Arial"/>
               </a:rPr>
-              <a:t>Vehicle tracking via feed adapters; simulated data never published as live</a:t>
+              <a:t>Vehicle tracking that says when data is estimated</a:t>
             </a:r>
             <a:endParaRPr sz="1200"/>
           </a:p>
@@ -33154,7 +33154,7 @@
                 </a:solidFill>
                 <a:latin typeface="Arial"/>
               </a:rPr>
-              <a:t>Role-based access; fraud checks on votes</a:t>
+              <a:t>Role-based access; abuse checks on votes</a:t>
             </a:r>
             <a:endParaRPr sz="1200"/>
           </a:p>
@@ -33176,7 +33176,7 @@
                 </a:solidFill>
                 <a:latin typeface="Arial"/>
               </a:rPr>
-              <a:t>Read-only, citation-based assistant</a:t>
+              <a:t>Read-only assistant that cites its sources</a:t>
             </a:r>
             <a:endParaRPr sz="1200"/>
           </a:p>
@@ -36219,7 +36219,7 @@
                 </a:solidFill>
                 <a:latin typeface="Arial"/>
               </a:rPr>
-              <a:t>GTFS plus real-time alerts for any app; four languages and SMS; core features keep running if the database is down.</a:t>
+              <a:t>GTFS plus real-time alerts for any app; four languages and SMS; core features keep running even if part of the system fails.</a:t>
             </a:r>
             <a:endParaRPr sz="1150"/>
           </a:p>
@@ -36631,7 +36631,7 @@
                 </a:solidFill>
                 <a:latin typeface="Arial"/>
               </a:rPr>
-              <a:t>Fleet and crew planning will give the operator data-driven tools for reliable service, and core features are designed to keep working during a database outage.</a:t>
+              <a:t>Fleet and crew planning will give the operator data-driven tools for reliable service, and core features are designed to keep running even if part of the system fails.</a:t>
             </a:r>
             <a:endParaRPr sz="1200"/>
           </a:p>
@@ -37415,7 +37415,7 @@
                 </a:solidFill>
                 <a:latin typeface="Arial"/>
               </a:rPr>
-              <a:t>Acceptance targets we commit to</a:t>
+              <a:t>Targets we commit to</a:t>
             </a:r>
             <a:endParaRPr sz="1050"/>
           </a:p>
@@ -37458,7 +37458,7 @@
                 </a:solidFill>
                 <a:latin typeface="Arial"/>
               </a:rPr>
-              <a:t>Best-option rate at least 0.70; within 2 stops of best at least 0.92</a:t>
+              <a:t>The correct bus ranks first in the large majority of test cases</a:t>
             </a:r>
             <a:endParaRPr sz="1200"/>
           </a:p>
@@ -37480,7 +37480,7 @@
                 </a:solidFill>
                 <a:latin typeface="Arial"/>
               </a:rPr>
-              <a:t>Mean percentile rank at most 0.10 (lower is better)</a:t>
+              <a:t>Results return quickly enough for real-time use</a:t>
             </a:r>
             <a:endParaRPr sz="1200"/>
           </a:p>
@@ -37502,7 +37502,7 @@
                 </a:solidFill>
                 <a:latin typeface="Arial"/>
               </a:rPr>
-              <a:t>Coverage at least 0.95; p90 search latency at most 1.6 s</a:t>
+              <a:t>The system almost always returns at least one valid route</a:t>
             </a:r>
             <a:endParaRPr sz="1200"/>
           </a:p>
@@ -37524,7 +37524,7 @@
                 </a:solidFill>
                 <a:latin typeface="Arial"/>
               </a:rPr>
-              <a:t>Crew-to-bus ratio inside the 2.0 to 2.5 range of real undertakings</a:t>
+              <a:t>Crew-to-bus ratio in line with what real bus operators typically run</a:t>
             </a:r>
             <a:endParaRPr sz="1200"/>
           </a:p>
@@ -37956,7 +37956,7 @@
                 </a:solidFill>
                 <a:latin typeface="Arial"/>
               </a:rPr>
-              <a:t>Plug in a real vehicle feed through adapters (GTFS-RT, HTTP JSON, push)</a:t>
+              <a:t>Plug in BMTC's live vehicle-location feed once it is made available</a:t>
             </a:r>
             <a:endParaRPr sz="1200"/>
           </a:p>
@@ -38000,7 +38000,7 @@
                 </a:solidFill>
                 <a:latin typeface="Arial"/>
               </a:rPr>
-              <a:t>Payment gateway and identity check for Shakti; shared state (Redis) for scale</a:t>
+              <a:t>Payment gateway and identity check for Shakti; scaling to city-wide usage</a:t>
             </a:r>
             <a:endParaRPr sz="1200"/>
           </a:p>
@@ -38804,7 +38804,7 @@
                 </a:solidFill>
                 <a:latin typeface="Arial"/>
               </a:rPr>
-              <a:t>Connect BMTC's vehicle feed through the adapter interface (GTFS-RT, HTTP JSON or push); no rewrite needed.</a:t>
+              <a:t>Connect BMTC's vehicle-location feed once available, so live tracking replaces estimates.</a:t>
             </a:r>
             <a:endParaRPr sz="1150"/>
           </a:p>
@@ -41261,7 +41261,7 @@
                           </a:solidFill>
                           <a:latin typeface="Arial"/>
                         </a:rPr>
-                        <a:t>Stop resolution and ordered stop-pair index</a:t>
+                        <a:t>Stop-name cleaning and route indexing</a:t>
                       </a:r>
                       <a:endParaRPr sz="950"/>
                     </a:p>
@@ -41992,7 +41992,7 @@
                           </a:solidFill>
                           <a:latin typeface="Arial"/>
                         </a:rPr>
-                        <a:t>Transfer search, ranking, geometry, Metro, fares</a:t>
+                        <a:t>Transfer search, ranking, maps, Metro, fares</a:t>
                       </a:r>
                       <a:endParaRPr sz="950"/>
                     </a:p>
@@ -42725,7 +42725,7 @@
                           </a:solidFill>
                           <a:latin typeface="Arial"/>
                         </a:rPr>
-                        <a:t>Vehicle blocking with lower bound</a:t>
+                        <a:t>Minimum-fleet planning with lower bound</a:t>
                       </a:r>
                       <a:endParaRPr sz="950"/>
                     </a:p>
@@ -43456,7 +43456,7 @@
                           </a:solidFill>
                           <a:latin typeface="Arial"/>
                         </a:rPr>
-                        <a:t>Crew duties: DP cutting and pairing</a:t>
+                        <a:t>Crew duty planning</a:t>
                       </a:r>
                       <a:endParaRPr sz="950"/>
                     </a:p>
@@ -44187,7 +44187,7 @@
                           </a:solidFill>
                           <a:latin typeface="Arial"/>
                         </a:rPr>
-                        <a:t>API, auth, roles and MongoDB services</a:t>
+                        <a:t>Backend services: logins, roles, data storage</a:t>
                       </a:r>
                       <a:endParaRPr sz="950"/>
                     </a:p>
@@ -45655,7 +45655,7 @@
                           </a:solidFill>
                           <a:latin typeface="Arial"/>
                         </a:rPr>
-                        <a:t>GTFS static, alerts, vehicle-feed adapters</a:t>
+                        <a:t>Open data export, alerts, vehicle tracking</a:t>
                       </a:r>
                       <a:endParaRPr sz="950"/>
                     </a:p>
@@ -46386,7 +46386,7 @@
                           </a:solidFill>
                           <a:latin typeface="Arial"/>
                         </a:rPr>
-                        <a:t>React UI, languages and Android shell</a:t>
+                        <a:t>User interface, languages and mobile app</a:t>
                       </a:r>
                       <a:endParaRPr sz="950"/>
                     </a:p>
@@ -47127,7 +47127,7 @@
                           </a:solidFill>
                           <a:latin typeface="Arial"/>
                         </a:rPr>
-                        <a:t>Evaluation and rank-quality tuning</a:t>
+                        <a:t>Evaluation and ranking improvements</a:t>
                       </a:r>
                       <a:endParaRPr sz="950"/>
                     </a:p>
@@ -47856,7 +47856,7 @@
                           </a:solidFill>
                           <a:latin typeface="Arial"/>
                         </a:rPr>
-                        <a:t>Read-only AI assistant (retrieval)</a:t>
+                        <a:t>Read-only assistant</a:t>
                       </a:r>
                       <a:endParaRPr sz="950"/>
                     </a:p>
@@ -48585,7 +48585,7 @@
                           </a:solidFill>
                           <a:latin typeface="Arial"/>
                         </a:rPr>
-                        <a:t>Testing, CI, deployment and report</a:t>
+                        <a:t>Testing, deployment and final report</a:t>
                       </a:r>
                       <a:endParaRPr sz="950"/>
                     </a:p>
@@ -49342,7 +49342,7 @@
                 </a:solidFill>
                 <a:latin typeface="Arial"/>
               </a:rPr>
-              <a:t>1 Data and survey | 2 Journey engine | 3 Operations engines | 4 Platform services | 5 Open data and interface | 6 Evaluation, assistant and release</a:t>
+              <a:t>1 Data and survey | 2 Journey planner | 3 Operations planner | 4 Platform services | 5 Open data and interface | 6 Evaluation, assistant and release</a:t>
             </a:r>
             <a:endParaRPr sz="1100"/>
           </a:p>
@@ -49364,7 +49364,7 @@
                 </a:solidFill>
                 <a:latin typeface="Arial"/>
               </a:rPr>
-              <a:t>week 4 problem and literature | week 8 journey-engine demo | week 12 platform demo | week 16 final evaluation</a:t>
+              <a:t>week 4 problem and literature | week 8 journey-planner demo | week 12 platform demo | week 16 final evaluation</a:t>
             </a:r>
             <a:endParaRPr sz="1100"/>
           </a:p>
@@ -49676,7 +49676,7 @@
                           </a:solidFill>
                           <a:latin typeface="Arial"/>
                         </a:rPr>
-                        <a:t>Adapter interface (GTFS-RT, HTTP JSON, push); route-following ETA labelled as an estimate; simulated data never published as live</a:t>
+                        <a:t>Design so a live feed can be plugged in once BMTC provides one; until then, positions are clearly labelled as estimates</a:t>
                       </a:r>
                       <a:endParaRPr sz="1100"/>
                     </a:p>
@@ -49808,7 +49808,7 @@
                           </a:solidFill>
                           <a:latin typeface="Arial"/>
                         </a:rPr>
-                        <a:t>Assumptions (speed, layover, crew rules) held in parameter objects and shown with every result; validate against one depot in the pilot</a:t>
+                        <a:t>State the assumptions (speed, layover, crew rules) with every result; compare with one depot's real rosters in the pilot</a:t>
                       </a:r>
                       <a:endParaRPr sz="1100"/>
                     </a:p>
@@ -49938,7 +49938,7 @@
                           </a:solidFill>
                           <a:latin typeface="Arial"/>
                         </a:rPr>
-                        <a:t>Alias table, anchored stop resolution, and rejection of interchanges over 1.2 km apart</a:t>
+                        <a:t>A table of known alternative stop names, and rejection of transfers that need a long walk</a:t>
                       </a:r>
                       <a:endParaRPr sz="1100"/>
                     </a:p>
@@ -50070,7 +50070,7 @@
                           </a:solidFill>
                           <a:latin typeface="Arial"/>
                         </a:rPr>
-                        <a:t>Four fraud heuristics, grouping by origin-destination pair; recommendations advise, a depot manager decides</a:t>
+                        <a:t>Checks for suspicious voting patterns; recommendations only advise, a depot manager decides</a:t>
                       </a:r>
                       <a:endParaRPr sz="1100"/>
                     </a:p>
@@ -50200,7 +50200,7 @@
                           </a:solidFill>
                           <a:latin typeface="Arial"/>
                         </a:rPr>
-                        <a:t>Client UUID plus unique index for idempotent sync; cash variance reported, never auto-corrected</a:t>
+                        <a:t>Each offline sale carries a unique ID so a repeated sync is ignored; cash shortfalls shown, never auto-corrected</a:t>
                       </a:r>
                       <a:endParaRPr sz="1100"/>
                     </a:p>
@@ -50845,7 +50845,7 @@
                 </a:solidFill>
                 <a:latin typeface="Arial"/>
               </a:rPr>
-              <a:t>The inputs are in hand (BMTC's published timetable, stop coordinates, fare table and Metro network), the methods are established [1-7], the stack is standard and open-source, and a 16-week phased plan puts the core first.</a:t>
+              <a:t>The inputs are in hand (BMTC's published timetable, stop coordinates, fare table and Metro network), the methods are established in the literature [1-7], the technology choices are standard and well understood, and a 16-week phased plan puts the core first.</a:t>
             </a:r>
             <a:endParaRPr sz="1250"/>
           </a:p>
